--- a/dist/초4/수학/수와연산/초4_수학_수와연산_08_소수의덧셈과뺄셈_학생용.pptx
+++ b/dist/초4/수학/수와연산/초4_수학_수와연산_08_소수의덧셈과뺄셈_학생용.pptx
@@ -119,13 +119,13 @@
   <p:extLst>
     <p:ext uri="{521415D9-36F7-43E2-AB2F-B90AF26B5E84}">
       <p14:sectionLst xmlns:p14="http://schemas.microsoft.com/office/powerpoint/2010/main">
-        <p14:section name="도입" id="{f582281f-9ca8-3cb2-b4c4-743ab6996009}">
+        <p14:section name="도입" id="{bab32fbf-ee86-4a7c-7e78-c7ff7553b184}">
           <p14:sldIdLst>
             <p14:sldId id="256"/>
             <p14:sldId id="257"/>
           </p14:sldIdLst>
         </p14:section>
-        <p14:section name="개념" id="{d6d66c7a-295b-ea34-60bc-257662a3f720}">
+        <p14:section name="개념" id="{322fab2e-4e3b-5d22-5bcc-a8fb3ec3ceba}">
           <p14:sldIdLst>
             <p14:sldId id="258"/>
             <p14:sldId id="259"/>
@@ -133,31 +133,31 @@
             <p14:sldId id="263"/>
           </p14:sldIdLst>
         </p14:section>
-        <p14:section name="연습" id="{c5de6b20-176e-f4ea-db1c-4df21b476484}">
+        <p14:section name="연습" id="{9f6f68dd-e6d0-70d7-ae58-4b7e703aa805}">
           <p14:sldIdLst>
             <p14:sldId id="260"/>
             <p14:sldId id="261"/>
             <p14:sldId id="264"/>
           </p14:sldIdLst>
         </p14:section>
-        <p14:section name="개념" id="{0cf02d86-7ea1-bd83-b3b1-6b9beca62da7}">
+        <p14:section name="개념" id="{7dce8c8d-5aa3-4c2e-41fd-c9d8fe25cea6}">
           <p14:sldIdLst/>
         </p14:section>
-        <p14:section name="연습" id="{c3e5fe27-64c5-72f4-d312-983ac871cc6f}">
+        <p14:section name="연습" id="{7cc05f53-243b-2517-2ca4-28211fd480f4}">
           <p14:sldIdLst/>
         </p14:section>
-        <p14:section name="확인" id="{0e1c4a4f-5945-6cf8-cab0-20aa76f5da34}">
+        <p14:section name="확인" id="{e6bcc439-61cd-4f25-36a8-7f58180568c4}">
           <p14:sldIdLst>
             <p14:sldId id="265"/>
             <p14:sldId id="266"/>
           </p14:sldIdLst>
         </p14:section>
-        <p14:section name="정리" id="{4b9837e4-3fde-f938-f561-06b6ae5c45da}">
+        <p14:section name="정리" id="{67e52371-c805-a318-1572-3fc3acedbf13}">
           <p14:sldIdLst>
             <p14:sldId id="267"/>
           </p14:sldIdLst>
         </p14:section>
-        <p14:section name="보충" id="{1ae57535-0303-8f36-1897-645938857c9a}">
+        <p14:section name="보충" id="{134535e9-9c61-49fa-d5d2-5dc173f6cf1f}">
           <p14:sldIdLst>
             <p14:sldId id="268"/>
           </p14:sldIdLst>
